--- a/media/exports/reports/2025-12/growth-services.pptx
+++ b/media/exports/reports/2025-12/growth-services.pptx
@@ -219,49 +219,49 @@
                 <c:formatCode>$#,##0;[Red]($#,##0);"-"</c:formatCode>
                 <c:ptCount val="15"/>
                 <c:pt idx="0">
-                  <c:v>94520</c:v>
+                  <c:v>103550</c:v>
                 </c:pt>
                 <c:pt idx="1">
-                  <c:v>108140</c:v>
+                  <c:v>118390</c:v>
                 </c:pt>
                 <c:pt idx="2">
-                  <c:v>114895</c:v>
+                  <c:v>125715</c:v>
                 </c:pt>
                 <c:pt idx="3">
-                  <c:v>88250</c:v>
+                  <c:v>96560</c:v>
                 </c:pt>
                 <c:pt idx="4">
-                  <c:v>111010</c:v>
+                  <c:v>121275</c:v>
                 </c:pt>
                 <c:pt idx="5">
-                  <c:v>77175</c:v>
+                  <c:v>84340</c:v>
                 </c:pt>
                 <c:pt idx="6">
-                  <c:v>63970</c:v>
+                  <c:v>69985</c:v>
                 </c:pt>
                 <c:pt idx="7">
-                  <c:v>95555</c:v>
+                  <c:v>104970</c:v>
                 </c:pt>
                 <c:pt idx="8">
-                  <c:v>90220</c:v>
+                  <c:v>99060</c:v>
                 </c:pt>
                 <c:pt idx="9">
-                  <c:v>86320</c:v>
+                  <c:v>94805</c:v>
                 </c:pt>
                 <c:pt idx="10">
-                  <c:v>61475</c:v>
+                  <c:v>67745</c:v>
                 </c:pt>
                 <c:pt idx="11">
-                  <c:v>59535</c:v>
+                  <c:v>65650</c:v>
                 </c:pt>
                 <c:pt idx="12">
-                  <c:v>71260</c:v>
+                  <c:v>78550</c:v>
                 </c:pt>
                 <c:pt idx="13">
-                  <c:v>83940</c:v>
+                  <c:v>92575</c:v>
                 </c:pt>
                 <c:pt idx="14">
-                  <c:v>69420</c:v>
+                  <c:v>76600</c:v>
                 </c:pt>
               </c:numCache>
             </c:numRef>
@@ -310,7 +310,7 @@
         <c:axId val="-2100718248"/>
         <c:scaling>
           <c:orientation val="minMax"/>
-          <c:max val="125000.0"/>
+          <c:max val="150000.0"/>
           <c:min val="0.0"/>
         </c:scaling>
         <c:delete val="0"/>
@@ -345,7 +345,7 @@
         <c:crossAx val="-2101159928"/>
         <c:crosses val="autoZero"/>
         <c:crossBetween val="midCat"/>
-        <c:majorUnit val="25000.0"/>
+        <c:majorUnit val="50000.0"/>
       </c:valAx>
     </c:plotArea>
     <c:plotVisOnly val="1"/>
@@ -477,49 +477,49 @@
                 <c:formatCode>$#,##0;[Red]($#,##0);"-"</c:formatCode>
                 <c:ptCount val="15"/>
                 <c:pt idx="0">
-                  <c:v>70720</c:v>
+                  <c:v>77350</c:v>
                 </c:pt>
                 <c:pt idx="1">
-                  <c:v>88540</c:v>
+                  <c:v>96790</c:v>
                 </c:pt>
                 <c:pt idx="2">
-                  <c:v>94695</c:v>
+                  <c:v>103515</c:v>
                 </c:pt>
                 <c:pt idx="3">
-                  <c:v>66850</c:v>
+                  <c:v>73060</c:v>
                 </c:pt>
                 <c:pt idx="4">
-                  <c:v>84410</c:v>
+                  <c:v>92075</c:v>
                 </c:pt>
                 <c:pt idx="5">
-                  <c:v>48975</c:v>
+                  <c:v>53340</c:v>
                 </c:pt>
                 <c:pt idx="6">
-                  <c:v>37570</c:v>
+                  <c:v>40885</c:v>
                 </c:pt>
                 <c:pt idx="7">
-                  <c:v>59755</c:v>
+                  <c:v>65570</c:v>
                 </c:pt>
                 <c:pt idx="8">
-                  <c:v>64520</c:v>
+                  <c:v>70760</c:v>
                 </c:pt>
                 <c:pt idx="9">
-                  <c:v>64820</c:v>
+                  <c:v>71205</c:v>
                 </c:pt>
                 <c:pt idx="10">
-                  <c:v>38775</c:v>
+                  <c:v>42845</c:v>
                 </c:pt>
                 <c:pt idx="11">
-                  <c:v>38035</c:v>
+                  <c:v>42050</c:v>
                 </c:pt>
                 <c:pt idx="12">
-                  <c:v>45860</c:v>
+                  <c:v>50650</c:v>
                 </c:pt>
                 <c:pt idx="13">
-                  <c:v>46840</c:v>
+                  <c:v>51775</c:v>
                 </c:pt>
                 <c:pt idx="14">
-                  <c:v>29520</c:v>
+                  <c:v>32800</c:v>
                 </c:pt>
               </c:numCache>
             </c:numRef>
@@ -568,7 +568,7 @@
         <c:axId val="-2100718248"/>
         <c:scaling>
           <c:orientation val="minMax"/>
-          <c:max val="100000.0"/>
+          <c:max val="125000.0"/>
           <c:min val="0.0"/>
         </c:scaling>
         <c:delete val="0"/>
@@ -603,7 +603,7 @@
         <c:crossAx val="-2101159928"/>
         <c:crosses val="autoZero"/>
         <c:crossBetween val="midCat"/>
-        <c:majorUnit val="20000.0"/>
+        <c:majorUnit val="25000.0"/>
       </c:valAx>
     </c:plotArea>
     <c:plotVisOnly val="1"/>
@@ -735,49 +735,49 @@
                 <c:formatCode>$#,##0;[Red]($#,##0);"-"</c:formatCode>
                 <c:ptCount val="15"/>
                 <c:pt idx="0">
-                  <c:v>15000</c:v>
+                  <c:v>16500</c:v>
                 </c:pt>
                 <c:pt idx="1">
-                  <c:v>15000</c:v>
+                  <c:v>16500</c:v>
                 </c:pt>
                 <c:pt idx="2">
-                  <c:v>15000</c:v>
+                  <c:v>16500</c:v>
                 </c:pt>
                 <c:pt idx="3">
-                  <c:v>15000</c:v>
+                  <c:v>16500</c:v>
                 </c:pt>
                 <c:pt idx="4">
-                  <c:v>15000</c:v>
+                  <c:v>16500</c:v>
                 </c:pt>
                 <c:pt idx="5">
-                  <c:v>21800</c:v>
+                  <c:v>24000</c:v>
                 </c:pt>
                 <c:pt idx="6">
-                  <c:v>21800</c:v>
+                  <c:v>24000</c:v>
                 </c:pt>
                 <c:pt idx="7">
-                  <c:v>21800</c:v>
+                  <c:v>24000</c:v>
                 </c:pt>
                 <c:pt idx="8">
-                  <c:v>21800</c:v>
+                  <c:v>24000</c:v>
                 </c:pt>
                 <c:pt idx="9">
-                  <c:v>16300</c:v>
+                  <c:v>17900</c:v>
                 </c:pt>
                 <c:pt idx="10">
-                  <c:v>16300</c:v>
+                  <c:v>17900</c:v>
                 </c:pt>
                 <c:pt idx="11">
-                  <c:v>16300</c:v>
+                  <c:v>17900</c:v>
                 </c:pt>
                 <c:pt idx="12">
-                  <c:v>16300</c:v>
+                  <c:v>17900</c:v>
                 </c:pt>
                 <c:pt idx="13">
-                  <c:v>28300</c:v>
+                  <c:v>31100</c:v>
                 </c:pt>
                 <c:pt idx="14">
-                  <c:v>28300</c:v>
+                  <c:v>31100</c:v>
                 </c:pt>
               </c:numCache>
             </c:numRef>
@@ -826,7 +826,7 @@
         <c:axId val="-2100718248"/>
         <c:scaling>
           <c:orientation val="minMax"/>
-          <c:max val="30000.0"/>
+          <c:max val="40000.0"/>
           <c:min val="0.0"/>
         </c:scaling>
         <c:delete val="0"/>
@@ -993,49 +993,49 @@
                 <c:formatCode>$#,##0;[Red]($#,##0);"-"</c:formatCode>
                 <c:ptCount val="15"/>
                 <c:pt idx="0">
-                  <c:v>8800</c:v>
+                  <c:v>9700</c:v>
                 </c:pt>
                 <c:pt idx="1">
-                  <c:v>4600</c:v>
+                  <c:v>5100</c:v>
                 </c:pt>
                 <c:pt idx="2">
-                  <c:v>5200</c:v>
+                  <c:v>5700</c:v>
                 </c:pt>
                 <c:pt idx="3">
-                  <c:v>6400</c:v>
+                  <c:v>7000</c:v>
                 </c:pt>
                 <c:pt idx="4">
-                  <c:v>11600</c:v>
+                  <c:v>12700</c:v>
                 </c:pt>
                 <c:pt idx="5">
-                  <c:v>6400</c:v>
+                  <c:v>7000</c:v>
                 </c:pt>
                 <c:pt idx="6">
-                  <c:v>4600</c:v>
+                  <c:v>5100</c:v>
                 </c:pt>
                 <c:pt idx="7">
-                  <c:v>14000</c:v>
+                  <c:v>15400</c:v>
                 </c:pt>
                 <c:pt idx="8">
-                  <c:v>3900</c:v>
+                  <c:v>4300</c:v>
                 </c:pt>
                 <c:pt idx="9">
-                  <c:v>5200</c:v>
+                  <c:v>5700</c:v>
                 </c:pt>
                 <c:pt idx="10">
-                  <c:v>6400</c:v>
+                  <c:v>7000</c:v>
                 </c:pt>
                 <c:pt idx="11">
-                  <c:v>5200</c:v>
+                  <c:v>5700</c:v>
                 </c:pt>
                 <c:pt idx="12">
-                  <c:v>9100</c:v>
+                  <c:v>10000</c:v>
                 </c:pt>
                 <c:pt idx="13">
-                  <c:v>8800</c:v>
+                  <c:v>9700</c:v>
                 </c:pt>
                 <c:pt idx="14">
-                  <c:v>11600</c:v>
+                  <c:v>12700</c:v>
                 </c:pt>
               </c:numCache>
             </c:numRef>
@@ -1084,7 +1084,7 @@
         <c:axId val="-2100718248"/>
         <c:scaling>
           <c:orientation val="minMax"/>
-          <c:max val="15000.0"/>
+          <c:max val="20000.0"/>
           <c:min val="0.0"/>
         </c:scaling>
         <c:delete val="0"/>
@@ -1609,7 +1609,7 @@
           <a:lstStyle/>
           <a:p>
             <a:r>
-              <a:t>Services · All. December against December last year: (39.6%); Year to date (Jul to Dec 2025): $431,950; Gross margin, year to date: 64.0%. Revenue is $431,950 this financial year to date (Jul to Dec 2025). Training makes the highest gross margin (75.2%); Projects the lowest (61.0%). The business needs 99.2% gross margin just to cover overheads. Projects: 61.0% gross margin, 21.0 points over the 40.0% target ($55,450 ahead on $263,850 this financial year to date). Training: 75.2% gross margin, 35.2 points over the 40.0% target ($16,320 ahead on $46,300 this financial year to date).</a:t>
+              <a:t>Services · All. December against December last year: (39.1%); Year to date (Jul to Dec 2025): $475,925; Gross margin, year to date: 67.3%. Revenue is $475,925 this financial year to date (Jul to Dec 2025). Training makes the highest gross margin (77.4%); Projects the lowest (64.7%). The business needs 101.9% gross margin just to cover overheads. Projects: 64.7% gross margin, 24.7 points over the 40.0% target ($71,935 ahead on $291,325 this financial year to date). Training: 77.4% gross margin, 37.4 points over the 40.0% target ($19,020 ahead on $50,800 this financial year to date).</a:t>
             </a:r>
           </a:p>
         </p:txBody>
@@ -1679,7 +1679,7 @@
           <a:lstStyle/>
           <a:p>
             <a:r>
-              <a:t>Services · Projects. December against December last year: (68.8%); Year to date (Jul to Dec 2025): $263,850; Gross margin, year to date: 61.0%. Projects brought in $263,850 this financial year to date, at a 61.0% gross margin (below the 64.0% overall). Projects: 61.0% gross margin, 21.0 points over the 40.0% target ($55,450 ahead on $263,850 this financial year to date).</a:t>
+              <a:t>Services · Projects. December against December last year: (68.3%); Year to date (Jul to Dec 2025): $291,325; Gross margin, year to date: 64.7%. Projects brought in $291,325 this financial year to date, at a 64.7% gross margin (below the 67.3% overall). Projects: 64.7% gross margin, 24.7 points over the 40.0% target ($71,935 ahead on $291,325 this financial year to date).</a:t>
             </a:r>
           </a:p>
         </p:txBody>
@@ -1749,7 +1749,7 @@
           <a:lstStyle/>
           <a:p>
             <a:r>
-              <a:t>Services · Retainers. December against December last year: 88.7%; Year to date (Jul to Dec 2025): $121,800; Gross margin, year to date: 66.1%. Retainers brought in $121,800 this financial year to date, at a 66.1% gross margin (above the 64.0% overall). Retainers: 66.1% gross margin, 26.1 points over the 40.0% target ($31,740 ahead on $121,800 this financial year to date).</a:t>
+              <a:t>Services · Retainers. December against December last year: 88.5%; Year to date (Jul to Dec 2025): $133,800; Gross margin, year to date: 69.1%. Retainers brought in $133,800 this financial year to date, at a 69.1% gross margin (above the 67.3% overall). Retainers: 69.1% gross margin, 29.1 points over the 40.0% target ($38,940 ahead on $133,800 this financial year to date).</a:t>
             </a:r>
           </a:p>
         </p:txBody>
@@ -1819,7 +1819,7 @@
           <a:lstStyle/>
           <a:p>
             <a:r>
-              <a:t>Services · Training. December against December last year: 123.1%; Year to date (Jul to Dec 2025): $46,300; Gross margin, year to date: 75.2%. Training brought in $46,300 this financial year to date, at a 75.2% gross margin (above the 64.0% overall). Training: 75.2% gross margin, 35.2 points over the 40.0% target ($16,320 ahead on $46,300 this financial year to date).</a:t>
+              <a:t>Services · Training. December against December last year: 122.8%; Year to date (Jul to Dec 2025): $50,800; Gross margin, year to date: 77.4%. Training brought in $50,800 this financial year to date, at a 77.4% gross margin (above the 67.3% overall). Training: 77.4% gross margin, 37.4 points over the 40.0% target ($19,020 ahead on $50,800 this financial year to date).</a:t>
             </a:r>
           </a:p>
         </p:txBody>
@@ -1889,7 +1889,7 @@
           <a:lstStyle/>
           <a:p>
             <a:r>
-              <a:t>By type of work: financial year to date (Jul to Dec 2025) against the same period last year · Services. Same period last year: Not available: the data starts October 2024. From gross margin to profit: December's client work made $44,900 gross margin (64.7%). Consultant time not charged to client work took $17,630 and overheads $51,260, leaving ($23,990) profit before tax ((34.6%) of revenue). To cover overheads, client work needs a 99.2% gross margin on average.</a:t>
+              <a:t>By type of work: financial year to date (Jul to Dec 2025) against the same period last year · Services. Same period last year: Not available: the data starts October 2024. From gross margin to profit: December's client work made $52,080 gross margin (68.0%). Consultant time not charged to client work took $26,760 and overheads $51,260, leaving ($25,940) profit before tax ((33.9%) of revenue). To cover overheads, client work needs a 101.9% gross margin on average.</a:t>
             </a:r>
           </a:p>
         </p:txBody>
@@ -5304,7 +5304,7 @@
                 </a:solidFill>
                 <a:latin typeface="Roboto"/>
               </a:rPr>
-              <a:t>Data retrieved 2pm, Tue 6 Oct 2026 · Generated 8 Oct 2026, 9:35am · Sample data · Made with Python (python-pptx)</a:t>
+              <a:t>Data retrieved 2pm, Tue 6 Oct 2026 · Generated 9 Oct 2026, 8:41am · Sample data · Made with Python (python-pptx)</a:t>
             </a:r>
           </a:p>
         </p:txBody>
@@ -5650,7 +5650,7 @@
                 </a:solidFill>
                 <a:latin typeface="Roboto"/>
               </a:rPr>
-              <a:t>(39.6%)</a:t>
+              <a:t>(39.1%)</a:t>
             </a:r>
           </a:p>
         </p:txBody>
@@ -5689,7 +5689,7 @@
                 </a:solidFill>
                 <a:latin typeface="Roboto"/>
               </a:rPr>
-              <a:t>$69,420 against $114,895</a:t>
+              <a:t>$76,600 against $125,715</a:t>
             </a:r>
           </a:p>
         </p:txBody>
@@ -5816,7 +5816,7 @@
                 </a:solidFill>
                 <a:latin typeface="Roboto"/>
               </a:rPr>
-              <a:t>$431,950</a:t>
+              <a:t>$475,925</a:t>
             </a:r>
           </a:p>
         </p:txBody>
@@ -5982,7 +5982,7 @@
                 </a:solidFill>
                 <a:latin typeface="Roboto"/>
               </a:rPr>
-              <a:t>64.0%</a:t>
+              <a:t>67.3%</a:t>
             </a:r>
           </a:p>
         </p:txBody>
@@ -6021,7 +6021,7 @@
                 </a:solidFill>
                 <a:latin typeface="Roboto"/>
               </a:rPr>
-              <a:t>$276,290 before overheads</a:t>
+              <a:t>$320,265 before overheads</a:t>
             </a:r>
           </a:p>
         </p:txBody>
@@ -6166,7 +6166,7 @@
                 </a:solidFill>
                 <a:latin typeface="Roboto"/>
               </a:rPr>
-              <a:t>Revenue is $431,950 this financial year to date (Jul to Dec 2025). Training makes the highest gross margin (75.2%); Projects the lowest (61.0%). The business needs 99.2% gross margin just to cover overheads.</a:t>
+              <a:t>Revenue is $475,925 this financial year to date (Jul to Dec 2025). Training makes the highest gross margin (77.4%); Projects the lowest (64.7%). The business needs 101.9% gross margin just to cover overheads.</a:t>
             </a:r>
           </a:p>
         </p:txBody>
@@ -6293,7 +6293,7 @@
                 </a:solidFill>
                 <a:latin typeface="Roboto"/>
               </a:rPr>
-              <a:t>Projects: 61.0% gross margin, 21.0 points over the 40.0% target ($55,450 ahead on $263,850 this financial year to date). Training: 75.2% gross margin, 35.2 points over the 40.0% target ($16,320 ahead on $46,300 this financial year to date).</a:t>
+              <a:t>Projects: 64.7% gross margin, 24.7 points over the 40.0% target ($71,935 ahead on $291,325 this financial year to date). Training: 77.4% gross margin, 37.4 points over the 40.0% target ($19,020 ahead on $50,800 this financial year to date).</a:t>
             </a:r>
           </a:p>
         </p:txBody>
@@ -6371,7 +6371,7 @@
                 </a:solidFill>
                 <a:latin typeface="Roboto"/>
               </a:rPr>
-              <a:t>Data retrieved 2pm, Tue 6 Oct 2026 · Generated 8 Oct 2026, 9:35am · Sample data · Made with Python (python-pptx)</a:t>
+              <a:t>Data retrieved 2pm, Tue 6 Oct 2026 · Generated 9 Oct 2026, 8:41am · Sample data · Made with Python (python-pptx)</a:t>
             </a:r>
           </a:p>
         </p:txBody>
@@ -6717,7 +6717,7 @@
                 </a:solidFill>
                 <a:latin typeface="Roboto"/>
               </a:rPr>
-              <a:t>(68.8%)</a:t>
+              <a:t>(68.3%)</a:t>
             </a:r>
           </a:p>
         </p:txBody>
@@ -6756,7 +6756,7 @@
                 </a:solidFill>
                 <a:latin typeface="Roboto"/>
               </a:rPr>
-              <a:t>$29,520 against $94,695</a:t>
+              <a:t>$32,800 against $103,515</a:t>
             </a:r>
           </a:p>
         </p:txBody>
@@ -6883,7 +6883,7 @@
                 </a:solidFill>
                 <a:latin typeface="Roboto"/>
               </a:rPr>
-              <a:t>$263,850</a:t>
+              <a:t>$291,325</a:t>
             </a:r>
           </a:p>
         </p:txBody>
@@ -7049,7 +7049,7 @@
                 </a:solidFill>
                 <a:latin typeface="Roboto"/>
               </a:rPr>
-              <a:t>61.0%</a:t>
+              <a:t>64.7%</a:t>
             </a:r>
           </a:p>
         </p:txBody>
@@ -7088,7 +7088,7 @@
                 </a:solidFill>
                 <a:latin typeface="Roboto"/>
               </a:rPr>
-              <a:t>$160,990 before overheads</a:t>
+              <a:t>$188,465 before overheads</a:t>
             </a:r>
           </a:p>
         </p:txBody>
@@ -7233,7 +7233,7 @@
                 </a:solidFill>
                 <a:latin typeface="Roboto"/>
               </a:rPr>
-              <a:t>Projects brought in $263,850 this financial year to date, at a 61.0% gross margin (below the 64.0% overall).</a:t>
+              <a:t>Projects brought in $291,325 this financial year to date, at a 64.7% gross margin (below the 67.3% overall).</a:t>
             </a:r>
           </a:p>
         </p:txBody>
@@ -7360,7 +7360,7 @@
                 </a:solidFill>
                 <a:latin typeface="Roboto"/>
               </a:rPr>
-              <a:t>Projects: 61.0% gross margin, 21.0 points over the 40.0% target ($55,450 ahead on $263,850 this financial year to date).</a:t>
+              <a:t>Projects: 64.7% gross margin, 24.7 points over the 40.0% target ($71,935 ahead on $291,325 this financial year to date).</a:t>
             </a:r>
           </a:p>
         </p:txBody>
@@ -7438,7 +7438,7 @@
                 </a:solidFill>
                 <a:latin typeface="Roboto"/>
               </a:rPr>
-              <a:t>Data retrieved 2pm, Tue 6 Oct 2026 · Generated 8 Oct 2026, 9:35am · Sample data · Made with Python (python-pptx)</a:t>
+              <a:t>Data retrieved 2pm, Tue 6 Oct 2026 · Generated 9 Oct 2026, 8:41am · Sample data · Made with Python (python-pptx)</a:t>
             </a:r>
           </a:p>
         </p:txBody>
@@ -7784,7 +7784,7 @@
                 </a:solidFill>
                 <a:latin typeface="Roboto"/>
               </a:rPr>
-              <a:t>88.7%</a:t>
+              <a:t>88.5%</a:t>
             </a:r>
           </a:p>
         </p:txBody>
@@ -7823,7 +7823,7 @@
                 </a:solidFill>
                 <a:latin typeface="Roboto"/>
               </a:rPr>
-              <a:t>$28,300 against $15,000</a:t>
+              <a:t>$31,100 against $16,500</a:t>
             </a:r>
           </a:p>
         </p:txBody>
@@ -7950,7 +7950,7 @@
                 </a:solidFill>
                 <a:latin typeface="Roboto"/>
               </a:rPr>
-              <a:t>$121,800</a:t>
+              <a:t>$133,800</a:t>
             </a:r>
           </a:p>
         </p:txBody>
@@ -8116,7 +8116,7 @@
                 </a:solidFill>
                 <a:latin typeface="Roboto"/>
               </a:rPr>
-              <a:t>66.1%</a:t>
+              <a:t>69.1%</a:t>
             </a:r>
           </a:p>
         </p:txBody>
@@ -8155,7 +8155,7 @@
                 </a:solidFill>
                 <a:latin typeface="Roboto"/>
               </a:rPr>
-              <a:t>$80,460 before overheads</a:t>
+              <a:t>$92,460 before overheads</a:t>
             </a:r>
           </a:p>
         </p:txBody>
@@ -8300,7 +8300,7 @@
                 </a:solidFill>
                 <a:latin typeface="Roboto"/>
               </a:rPr>
-              <a:t>Retainers brought in $121,800 this financial year to date, at a 66.1% gross margin (above the 64.0% overall).</a:t>
+              <a:t>Retainers brought in $133,800 this financial year to date, at a 69.1% gross margin (above the 67.3% overall).</a:t>
             </a:r>
           </a:p>
         </p:txBody>
@@ -8427,7 +8427,7 @@
                 </a:solidFill>
                 <a:latin typeface="Roboto"/>
               </a:rPr>
-              <a:t>Retainers: 66.1% gross margin, 26.1 points over the 40.0% target ($31,740 ahead on $121,800 this financial year to date).</a:t>
+              <a:t>Retainers: 69.1% gross margin, 29.1 points over the 40.0% target ($38,940 ahead on $133,800 this financial year to date).</a:t>
             </a:r>
           </a:p>
         </p:txBody>
@@ -8505,7 +8505,7 @@
                 </a:solidFill>
                 <a:latin typeface="Roboto"/>
               </a:rPr>
-              <a:t>Data retrieved 2pm, Tue 6 Oct 2026 · Generated 8 Oct 2026, 9:35am · Sample data · Made with Python (python-pptx)</a:t>
+              <a:t>Data retrieved 2pm, Tue 6 Oct 2026 · Generated 9 Oct 2026, 8:41am · Sample data · Made with Python (python-pptx)</a:t>
             </a:r>
           </a:p>
         </p:txBody>
@@ -8851,7 +8851,7 @@
                 </a:solidFill>
                 <a:latin typeface="Roboto"/>
               </a:rPr>
-              <a:t>123.1%</a:t>
+              <a:t>122.8%</a:t>
             </a:r>
           </a:p>
         </p:txBody>
@@ -8890,7 +8890,7 @@
                 </a:solidFill>
                 <a:latin typeface="Roboto"/>
               </a:rPr>
-              <a:t>$11,600 against $5,200</a:t>
+              <a:t>$12,700 against $5,700</a:t>
             </a:r>
           </a:p>
         </p:txBody>
@@ -9017,7 +9017,7 @@
                 </a:solidFill>
                 <a:latin typeface="Roboto"/>
               </a:rPr>
-              <a:t>$46,300</a:t>
+              <a:t>$50,800</a:t>
             </a:r>
           </a:p>
         </p:txBody>
@@ -9183,7 +9183,7 @@
                 </a:solidFill>
                 <a:latin typeface="Roboto"/>
               </a:rPr>
-              <a:t>75.2%</a:t>
+              <a:t>77.4%</a:t>
             </a:r>
           </a:p>
         </p:txBody>
@@ -9222,7 +9222,7 @@
                 </a:solidFill>
                 <a:latin typeface="Roboto"/>
               </a:rPr>
-              <a:t>$34,840 before overheads</a:t>
+              <a:t>$39,340 before overheads</a:t>
             </a:r>
           </a:p>
         </p:txBody>
@@ -9367,7 +9367,7 @@
                 </a:solidFill>
                 <a:latin typeface="Roboto"/>
               </a:rPr>
-              <a:t>Training brought in $46,300 this financial year to date, at a 75.2% gross margin (above the 64.0% overall).</a:t>
+              <a:t>Training brought in $50,800 this financial year to date, at a 77.4% gross margin (above the 67.3% overall).</a:t>
             </a:r>
           </a:p>
         </p:txBody>
@@ -9494,7 +9494,7 @@
                 </a:solidFill>
                 <a:latin typeface="Roboto"/>
               </a:rPr>
-              <a:t>Training: 75.2% gross margin, 35.2 points over the 40.0% target ($16,320 ahead on $46,300 this financial year to date).</a:t>
+              <a:t>Training: 77.4% gross margin, 37.4 points over the 40.0% target ($19,020 ahead on $50,800 this financial year to date).</a:t>
             </a:r>
           </a:p>
         </p:txBody>
@@ -9572,7 +9572,7 @@
                 </a:solidFill>
                 <a:latin typeface="Roboto"/>
               </a:rPr>
-              <a:t>Data retrieved 2pm, Tue 6 Oct 2026 · Generated 8 Oct 2026, 9:35am · Sample data · Made with Python (python-pptx)</a:t>
+              <a:t>Data retrieved 2pm, Tue 6 Oct 2026 · Generated 9 Oct 2026, 8:41am · Sample data · Made with Python (python-pptx)</a:t>
             </a:r>
           </a:p>
         </p:txBody>
@@ -9791,7 +9791,7 @@
                 </a:solidFill>
                 <a:latin typeface="Roboto"/>
               </a:rPr>
-              <a:t>Same period last year: Not available: the data starts October 2024. From gross margin to profit: December's client work made $44,900 gross margin (64.7%). Consultant time not charged to client work took $17,630 and overheads $51,260, leaving ($23,990) profit before tax ((34.6%) of revenue). To cover overheads, client work needs a 99.2% gross margin on average.</a:t>
+              <a:t>Same period last year: Not available: the data starts October 2024. From gross margin to profit: December's client work made $52,080 gross margin (68.0%). Consultant time not charged to client work took $26,760 and overheads $51,260, leaving ($25,940) profit before tax ((33.9%) of revenue). To cover overheads, client work needs a 101.9% gross margin on average.</a:t>
             </a:r>
           </a:p>
         </p:txBody>
@@ -10022,7 +10022,7 @@
                           </a:solidFill>
                           <a:latin typeface="Roboto"/>
                         </a:rPr>
-                        <a:t>$263,850</a:t>
+                        <a:t>$291,325</a:t>
                       </a:r>
                     </a:p>
                   </a:txBody>
@@ -10103,7 +10103,7 @@
                           </a:solidFill>
                           <a:latin typeface="Roboto"/>
                         </a:rPr>
-                        <a:t>$160,990</a:t>
+                        <a:t>$188,465</a:t>
                       </a:r>
                     </a:p>
                   </a:txBody>
@@ -10130,7 +10130,7 @@
                           </a:solidFill>
                           <a:latin typeface="Roboto"/>
                         </a:rPr>
-                        <a:t>61.0%</a:t>
+                        <a:t>64.7%</a:t>
                       </a:r>
                     </a:p>
                   </a:txBody>
@@ -10186,7 +10186,7 @@
                           </a:solidFill>
                           <a:latin typeface="Roboto"/>
                         </a:rPr>
-                        <a:t>$121,800</a:t>
+                        <a:t>$133,800</a:t>
                       </a:r>
                     </a:p>
                   </a:txBody>
@@ -10267,7 +10267,7 @@
                           </a:solidFill>
                           <a:latin typeface="Roboto"/>
                         </a:rPr>
-                        <a:t>$80,460</a:t>
+                        <a:t>$92,460</a:t>
                       </a:r>
                     </a:p>
                   </a:txBody>
@@ -10294,7 +10294,7 @@
                           </a:solidFill>
                           <a:latin typeface="Roboto"/>
                         </a:rPr>
-                        <a:t>66.1%</a:t>
+                        <a:t>69.1%</a:t>
                       </a:r>
                     </a:p>
                   </a:txBody>
@@ -10350,7 +10350,7 @@
                           </a:solidFill>
                           <a:latin typeface="Roboto"/>
                         </a:rPr>
-                        <a:t>$46,300</a:t>
+                        <a:t>$50,800</a:t>
                       </a:r>
                     </a:p>
                   </a:txBody>
@@ -10431,7 +10431,7 @@
                           </a:solidFill>
                           <a:latin typeface="Roboto"/>
                         </a:rPr>
-                        <a:t>$34,840</a:t>
+                        <a:t>$39,340</a:t>
                       </a:r>
                     </a:p>
                   </a:txBody>
@@ -10458,7 +10458,7 @@
                           </a:solidFill>
                           <a:latin typeface="Roboto"/>
                         </a:rPr>
-                        <a:t>75.2%</a:t>
+                        <a:t>77.4%</a:t>
                       </a:r>
                     </a:p>
                   </a:txBody>
@@ -10514,7 +10514,7 @@
                           </a:solidFill>
                           <a:latin typeface="Roboto"/>
                         </a:rPr>
-                        <a:t>$431,950</a:t>
+                        <a:t>$475,925</a:t>
                       </a:r>
                     </a:p>
                   </a:txBody>
@@ -10595,7 +10595,7 @@
                           </a:solidFill>
                           <a:latin typeface="Roboto"/>
                         </a:rPr>
-                        <a:t>$276,290</a:t>
+                        <a:t>$320,265</a:t>
                       </a:r>
                     </a:p>
                   </a:txBody>
@@ -10622,7 +10622,7 @@
                           </a:solidFill>
                           <a:latin typeface="Roboto"/>
                         </a:rPr>
-                        <a:t>64.0%</a:t>
+                        <a:t>67.3%</a:t>
                       </a:r>
                     </a:p>
                   </a:txBody>
@@ -10710,7 +10710,7 @@
                 </a:solidFill>
                 <a:latin typeface="Roboto"/>
               </a:rPr>
-              <a:t>Data retrieved 2pm, Tue 6 Oct 2026 · Generated 8 Oct 2026, 9:35am · Sample data · Made with Python (python-pptx)</a:t>
+              <a:t>Data retrieved 2pm, Tue 6 Oct 2026 · Generated 9 Oct 2026, 8:41am · Sample data · Made with Python (python-pptx)</a:t>
             </a:r>
           </a:p>
         </p:txBody>
